--- a/common_tools/EOS26_template.pptx
+++ b/common_tools/EOS26_template.pptx
@@ -1305,10 +1305,10 @@
           <a:lstStyle/>
           <a:p>
             <a:r>
-              <a:rPr lang="en-US"/>
+              <a:rPr lang="en-US" dirty="0"/>
               <a:t>Click to edit Master title style</a:t>
             </a:r>
-            <a:endParaRPr lang="en-GB"/>
+            <a:endParaRPr lang="en-GB" dirty="0"/>
           </a:p>
         </p:txBody>
       </p:sp>
@@ -1429,38 +1429,38 @@
           <a:p>
             <a:pPr lvl="0"/>
             <a:r>
-              <a:rPr lang="en-US"/>
+              <a:rPr lang="en-US" dirty="0"/>
               <a:t>Edit Master text styles</a:t>
             </a:r>
           </a:p>
           <a:p>
             <a:pPr lvl="1"/>
             <a:r>
-              <a:rPr lang="en-US"/>
+              <a:rPr lang="en-US" dirty="0"/>
               <a:t>Second level</a:t>
             </a:r>
           </a:p>
           <a:p>
             <a:pPr lvl="2"/>
             <a:r>
-              <a:rPr lang="en-US"/>
+              <a:rPr lang="en-US" dirty="0"/>
               <a:t>Third level</a:t>
             </a:r>
           </a:p>
           <a:p>
             <a:pPr lvl="3"/>
             <a:r>
-              <a:rPr lang="en-US"/>
+              <a:rPr lang="en-US" dirty="0"/>
               <a:t>Fourth level</a:t>
             </a:r>
           </a:p>
           <a:p>
             <a:pPr lvl="4"/>
             <a:r>
-              <a:rPr lang="en-US"/>
+              <a:rPr lang="en-US" dirty="0"/>
               <a:t>Fifth level</a:t>
             </a:r>
-            <a:endParaRPr lang="en-GB"/>
+            <a:endParaRPr lang="en-GB" dirty="0"/>
           </a:p>
         </p:txBody>
       </p:sp>
@@ -1581,38 +1581,38 @@
           <a:p>
             <a:pPr lvl="0"/>
             <a:r>
-              <a:rPr lang="en-US"/>
+              <a:rPr lang="en-US" dirty="0"/>
               <a:t>Edit Master text styles</a:t>
             </a:r>
           </a:p>
           <a:p>
             <a:pPr lvl="1"/>
             <a:r>
-              <a:rPr lang="en-US"/>
+              <a:rPr lang="en-US" dirty="0"/>
               <a:t>Second level</a:t>
             </a:r>
           </a:p>
           <a:p>
             <a:pPr lvl="2"/>
             <a:r>
-              <a:rPr lang="en-US"/>
+              <a:rPr lang="en-US" dirty="0"/>
               <a:t>Third level</a:t>
             </a:r>
           </a:p>
           <a:p>
             <a:pPr lvl="3"/>
             <a:r>
-              <a:rPr lang="en-US"/>
+              <a:rPr lang="en-US" dirty="0"/>
               <a:t>Fourth level</a:t>
             </a:r>
           </a:p>
           <a:p>
             <a:pPr lvl="4"/>
             <a:r>
-              <a:rPr lang="en-US"/>
+              <a:rPr lang="en-US" dirty="0"/>
               <a:t>Fifth level</a:t>
             </a:r>
-            <a:endParaRPr lang="en-GB"/>
+            <a:endParaRPr lang="en-GB" dirty="0"/>
           </a:p>
         </p:txBody>
       </p:sp>
@@ -1635,13 +1635,20 @@
         <p:spPr/>
         <p:txBody>
           <a:bodyPr/>
-          <a:lstStyle/>
+          <a:lstStyle>
+            <a:lvl1pPr>
+              <a:defRPr>
+                <a:latin typeface="Candara" panose="020E0502030303020204" pitchFamily="34" charset="0"/>
+              </a:defRPr>
+            </a:lvl1pPr>
+          </a:lstStyle>
           <a:p>
             <a:fld id="{9351F72D-EA3D-46A2-B53E-E9378EBFE7FE}" type="datetimeFigureOut">
               <a:rPr lang="en-GB" smtClean="0"/>
+              <a:pPr/>
               <a:t>21/04/2026</a:t>
             </a:fld>
-            <a:endParaRPr lang="en-GB"/>
+            <a:endParaRPr lang="en-GB" dirty="0"/>
           </a:p>
         </p:txBody>
       </p:sp>
@@ -1664,9 +1671,15 @@
         <p:spPr/>
         <p:txBody>
           <a:bodyPr/>
-          <a:lstStyle/>
-          <a:p>
-            <a:endParaRPr lang="en-GB"/>
+          <a:lstStyle>
+            <a:lvl1pPr>
+              <a:defRPr>
+                <a:latin typeface="Candara" panose="020E0502030303020204" pitchFamily="34" charset="0"/>
+              </a:defRPr>
+            </a:lvl1pPr>
+          </a:lstStyle>
+          <a:p>
+            <a:endParaRPr lang="en-GB" dirty="0"/>
           </a:p>
         </p:txBody>
       </p:sp>
@@ -1689,13 +1702,20 @@
         <p:spPr/>
         <p:txBody>
           <a:bodyPr/>
-          <a:lstStyle/>
+          <a:lstStyle>
+            <a:lvl1pPr>
+              <a:defRPr>
+                <a:latin typeface="Candara" panose="020E0502030303020204" pitchFamily="34" charset="0"/>
+              </a:defRPr>
+            </a:lvl1pPr>
+          </a:lstStyle>
           <a:p>
             <a:fld id="{05EA7042-E667-43C8-980A-4100FA190E65}" type="slidenum">
               <a:rPr lang="en-GB" smtClean="0"/>
+              <a:pPr/>
               <a:t>‹#›</a:t>
             </a:fld>
-            <a:endParaRPr lang="en-GB"/>
+            <a:endParaRPr lang="en-GB" dirty="0"/>
           </a:p>
         </p:txBody>
       </p:sp>
@@ -1751,10 +1771,10 @@
           <a:lstStyle/>
           <a:p>
             <a:r>
-              <a:rPr lang="en-US"/>
+              <a:rPr lang="en-US" dirty="0"/>
               <a:t>Click to edit Master title style</a:t>
             </a:r>
-            <a:endParaRPr lang="en-GB"/>
+            <a:endParaRPr lang="en-GB" dirty="0"/>
           </a:p>
         </p:txBody>
       </p:sp>
@@ -1777,13 +1797,20 @@
         <p:spPr/>
         <p:txBody>
           <a:bodyPr/>
-          <a:lstStyle/>
+          <a:lstStyle>
+            <a:lvl1pPr>
+              <a:defRPr>
+                <a:latin typeface="Candara" panose="020E0502030303020204" pitchFamily="34" charset="0"/>
+              </a:defRPr>
+            </a:lvl1pPr>
+          </a:lstStyle>
           <a:p>
             <a:fld id="{9351F72D-EA3D-46A2-B53E-E9378EBFE7FE}" type="datetimeFigureOut">
               <a:rPr lang="en-GB" smtClean="0"/>
+              <a:pPr/>
               <a:t>21/04/2026</a:t>
             </a:fld>
-            <a:endParaRPr lang="en-GB"/>
+            <a:endParaRPr lang="en-GB" dirty="0"/>
           </a:p>
         </p:txBody>
       </p:sp>
@@ -1806,9 +1833,15 @@
         <p:spPr/>
         <p:txBody>
           <a:bodyPr/>
-          <a:lstStyle/>
-          <a:p>
-            <a:endParaRPr lang="en-GB"/>
+          <a:lstStyle>
+            <a:lvl1pPr>
+              <a:defRPr>
+                <a:latin typeface="Candara" panose="020E0502030303020204" pitchFamily="34" charset="0"/>
+              </a:defRPr>
+            </a:lvl1pPr>
+          </a:lstStyle>
+          <a:p>
+            <a:endParaRPr lang="en-GB" dirty="0"/>
           </a:p>
         </p:txBody>
       </p:sp>
@@ -1831,13 +1864,20 @@
         <p:spPr/>
         <p:txBody>
           <a:bodyPr/>
-          <a:lstStyle/>
+          <a:lstStyle>
+            <a:lvl1pPr>
+              <a:defRPr>
+                <a:latin typeface="Candara" panose="020E0502030303020204" pitchFamily="34" charset="0"/>
+              </a:defRPr>
+            </a:lvl1pPr>
+          </a:lstStyle>
           <a:p>
             <a:fld id="{05EA7042-E667-43C8-980A-4100FA190E65}" type="slidenum">
               <a:rPr lang="en-GB" smtClean="0"/>
+              <a:pPr/>
               <a:t>‹#›</a:t>
             </a:fld>
-            <a:endParaRPr lang="en-GB"/>
+            <a:endParaRPr lang="en-GB" dirty="0"/>
           </a:p>
         </p:txBody>
       </p:sp>
@@ -1890,13 +1930,20 @@
         <p:spPr/>
         <p:txBody>
           <a:bodyPr/>
-          <a:lstStyle/>
+          <a:lstStyle>
+            <a:lvl1pPr>
+              <a:defRPr>
+                <a:latin typeface="Candara" panose="020E0502030303020204" pitchFamily="34" charset="0"/>
+              </a:defRPr>
+            </a:lvl1pPr>
+          </a:lstStyle>
           <a:p>
             <a:fld id="{9351F72D-EA3D-46A2-B53E-E9378EBFE7FE}" type="datetimeFigureOut">
               <a:rPr lang="en-GB" smtClean="0"/>
+              <a:pPr/>
               <a:t>21/04/2026</a:t>
             </a:fld>
-            <a:endParaRPr lang="en-GB"/>
+            <a:endParaRPr lang="en-GB" dirty="0"/>
           </a:p>
         </p:txBody>
       </p:sp>
@@ -1919,9 +1966,15 @@
         <p:spPr/>
         <p:txBody>
           <a:bodyPr/>
-          <a:lstStyle/>
-          <a:p>
-            <a:endParaRPr lang="en-GB"/>
+          <a:lstStyle>
+            <a:lvl1pPr>
+              <a:defRPr>
+                <a:latin typeface="Candara" panose="020E0502030303020204" pitchFamily="34" charset="0"/>
+              </a:defRPr>
+            </a:lvl1pPr>
+          </a:lstStyle>
+          <a:p>
+            <a:endParaRPr lang="en-GB" dirty="0"/>
           </a:p>
         </p:txBody>
       </p:sp>
@@ -1944,13 +1997,20 @@
         <p:spPr/>
         <p:txBody>
           <a:bodyPr/>
-          <a:lstStyle/>
+          <a:lstStyle>
+            <a:lvl1pPr>
+              <a:defRPr>
+                <a:latin typeface="Candara" panose="020E0502030303020204" pitchFamily="34" charset="0"/>
+              </a:defRPr>
+            </a:lvl1pPr>
+          </a:lstStyle>
           <a:p>
             <a:fld id="{05EA7042-E667-43C8-980A-4100FA190E65}" type="slidenum">
               <a:rPr lang="en-GB" smtClean="0"/>
+              <a:pPr/>
               <a:t>‹#›</a:t>
             </a:fld>
-            <a:endParaRPr lang="en-GB"/>
+            <a:endParaRPr lang="en-GB" dirty="0"/>
           </a:p>
         </p:txBody>
       </p:sp>
@@ -2017,10 +2077,10 @@
           </a:lstStyle>
           <a:p>
             <a:r>
-              <a:rPr lang="en-US"/>
+              <a:rPr lang="en-US" dirty="0"/>
               <a:t>Click to edit Master title style</a:t>
             </a:r>
-            <a:endParaRPr lang="en-GB"/>
+            <a:endParaRPr lang="en-GB" dirty="0"/>
           </a:p>
         </p:txBody>
       </p:sp>
@@ -2216,7 +2276,7 @@
           <a:p>
             <a:pPr lvl="0"/>
             <a:r>
-              <a:rPr lang="en-US"/>
+              <a:rPr lang="en-US" dirty="0"/>
               <a:t>Edit Master text styles</a:t>
             </a:r>
           </a:p>
@@ -2241,13 +2301,20 @@
         <p:spPr/>
         <p:txBody>
           <a:bodyPr/>
-          <a:lstStyle/>
+          <a:lstStyle>
+            <a:lvl1pPr>
+              <a:defRPr>
+                <a:latin typeface="Candara" panose="020E0502030303020204" pitchFamily="34" charset="0"/>
+              </a:defRPr>
+            </a:lvl1pPr>
+          </a:lstStyle>
           <a:p>
             <a:fld id="{9351F72D-EA3D-46A2-B53E-E9378EBFE7FE}" type="datetimeFigureOut">
               <a:rPr lang="en-GB" smtClean="0"/>
+              <a:pPr/>
               <a:t>21/04/2026</a:t>
             </a:fld>
-            <a:endParaRPr lang="en-GB"/>
+            <a:endParaRPr lang="en-GB" dirty="0"/>
           </a:p>
         </p:txBody>
       </p:sp>
@@ -2270,9 +2337,15 @@
         <p:spPr/>
         <p:txBody>
           <a:bodyPr/>
-          <a:lstStyle/>
-          <a:p>
-            <a:endParaRPr lang="en-GB"/>
+          <a:lstStyle>
+            <a:lvl1pPr>
+              <a:defRPr>
+                <a:latin typeface="Candara" panose="020E0502030303020204" pitchFamily="34" charset="0"/>
+              </a:defRPr>
+            </a:lvl1pPr>
+          </a:lstStyle>
+          <a:p>
+            <a:endParaRPr lang="en-GB" dirty="0"/>
           </a:p>
         </p:txBody>
       </p:sp>
@@ -2295,13 +2368,20 @@
         <p:spPr/>
         <p:txBody>
           <a:bodyPr/>
-          <a:lstStyle/>
+          <a:lstStyle>
+            <a:lvl1pPr>
+              <a:defRPr>
+                <a:latin typeface="Candara" panose="020E0502030303020204" pitchFamily="34" charset="0"/>
+              </a:defRPr>
+            </a:lvl1pPr>
+          </a:lstStyle>
           <a:p>
             <a:fld id="{05EA7042-E667-43C8-980A-4100FA190E65}" type="slidenum">
               <a:rPr lang="en-GB" smtClean="0"/>
+              <a:pPr/>
               <a:t>‹#›</a:t>
             </a:fld>
-            <a:endParaRPr lang="en-GB"/>
+            <a:endParaRPr lang="en-GB" dirty="0"/>
           </a:p>
         </p:txBody>
       </p:sp>
@@ -2568,13 +2648,20 @@
         <p:spPr/>
         <p:txBody>
           <a:bodyPr/>
-          <a:lstStyle/>
+          <a:lstStyle>
+            <a:lvl1pPr>
+              <a:defRPr>
+                <a:latin typeface="Candara" panose="020E0502030303020204" pitchFamily="34" charset="0"/>
+              </a:defRPr>
+            </a:lvl1pPr>
+          </a:lstStyle>
           <a:p>
             <a:fld id="{9351F72D-EA3D-46A2-B53E-E9378EBFE7FE}" type="datetimeFigureOut">
               <a:rPr lang="en-GB" smtClean="0"/>
+              <a:pPr/>
               <a:t>21/04/2026</a:t>
             </a:fld>
-            <a:endParaRPr lang="en-GB"/>
+            <a:endParaRPr lang="en-GB" dirty="0"/>
           </a:p>
         </p:txBody>
       </p:sp>
@@ -2597,9 +2684,15 @@
         <p:spPr/>
         <p:txBody>
           <a:bodyPr/>
-          <a:lstStyle/>
-          <a:p>
-            <a:endParaRPr lang="en-GB"/>
+          <a:lstStyle>
+            <a:lvl1pPr>
+              <a:defRPr>
+                <a:latin typeface="Candara" panose="020E0502030303020204" pitchFamily="34" charset="0"/>
+              </a:defRPr>
+            </a:lvl1pPr>
+          </a:lstStyle>
+          <a:p>
+            <a:endParaRPr lang="en-GB" dirty="0"/>
           </a:p>
         </p:txBody>
       </p:sp>
@@ -2622,13 +2715,20 @@
         <p:spPr/>
         <p:txBody>
           <a:bodyPr/>
-          <a:lstStyle/>
+          <a:lstStyle>
+            <a:lvl1pPr>
+              <a:defRPr>
+                <a:latin typeface="Candara" panose="020E0502030303020204" pitchFamily="34" charset="0"/>
+              </a:defRPr>
+            </a:lvl1pPr>
+          </a:lstStyle>
           <a:p>
             <a:fld id="{05EA7042-E667-43C8-980A-4100FA190E65}" type="slidenum">
               <a:rPr lang="en-GB" smtClean="0"/>
+              <a:pPr/>
               <a:t>‹#›</a:t>
             </a:fld>
-            <a:endParaRPr lang="en-GB"/>
+            <a:endParaRPr lang="en-GB" dirty="0"/>
           </a:p>
         </p:txBody>
       </p:sp>
@@ -2714,38 +2814,38 @@
           <a:p>
             <a:pPr lvl="0"/>
             <a:r>
-              <a:rPr lang="en-US"/>
+              <a:rPr lang="en-US" dirty="0"/>
               <a:t>Edit Master text styles</a:t>
             </a:r>
           </a:p>
           <a:p>
             <a:pPr lvl="1"/>
             <a:r>
-              <a:rPr lang="en-US"/>
+              <a:rPr lang="en-US" dirty="0"/>
               <a:t>Second level</a:t>
             </a:r>
           </a:p>
           <a:p>
             <a:pPr lvl="2"/>
             <a:r>
-              <a:rPr lang="en-US"/>
+              <a:rPr lang="en-US" dirty="0"/>
               <a:t>Third level</a:t>
             </a:r>
           </a:p>
           <a:p>
             <a:pPr lvl="3"/>
             <a:r>
-              <a:rPr lang="en-US"/>
+              <a:rPr lang="en-US" dirty="0"/>
               <a:t>Fourth level</a:t>
             </a:r>
           </a:p>
           <a:p>
             <a:pPr lvl="4"/>
             <a:r>
-              <a:rPr lang="en-US"/>
+              <a:rPr lang="en-US" dirty="0"/>
               <a:t>Fifth level</a:t>
             </a:r>
-            <a:endParaRPr lang="en-GB"/>
+            <a:endParaRPr lang="en-GB" dirty="0"/>
           </a:p>
         </p:txBody>
       </p:sp>
@@ -2768,13 +2868,20 @@
         <p:spPr/>
         <p:txBody>
           <a:bodyPr/>
-          <a:lstStyle/>
+          <a:lstStyle>
+            <a:lvl1pPr>
+              <a:defRPr>
+                <a:latin typeface="Candara" panose="020E0502030303020204" pitchFamily="34" charset="0"/>
+              </a:defRPr>
+            </a:lvl1pPr>
+          </a:lstStyle>
           <a:p>
             <a:fld id="{9351F72D-EA3D-46A2-B53E-E9378EBFE7FE}" type="datetimeFigureOut">
               <a:rPr lang="en-GB" smtClean="0"/>
+              <a:pPr/>
               <a:t>21/04/2026</a:t>
             </a:fld>
-            <a:endParaRPr lang="en-GB"/>
+            <a:endParaRPr lang="en-GB" dirty="0"/>
           </a:p>
         </p:txBody>
       </p:sp>
@@ -2797,9 +2904,15 @@
         <p:spPr/>
         <p:txBody>
           <a:bodyPr/>
-          <a:lstStyle/>
-          <a:p>
-            <a:endParaRPr lang="en-GB"/>
+          <a:lstStyle>
+            <a:lvl1pPr>
+              <a:defRPr>
+                <a:latin typeface="Candara" panose="020E0502030303020204" pitchFamily="34" charset="0"/>
+              </a:defRPr>
+            </a:lvl1pPr>
+          </a:lstStyle>
+          <a:p>
+            <a:endParaRPr lang="en-GB" dirty="0"/>
           </a:p>
         </p:txBody>
       </p:sp>
@@ -2822,13 +2935,20 @@
         <p:spPr/>
         <p:txBody>
           <a:bodyPr/>
-          <a:lstStyle/>
+          <a:lstStyle>
+            <a:lvl1pPr>
+              <a:defRPr>
+                <a:latin typeface="Candara" panose="020E0502030303020204" pitchFamily="34" charset="0"/>
+              </a:defRPr>
+            </a:lvl1pPr>
+          </a:lstStyle>
           <a:p>
             <a:fld id="{05EA7042-E667-43C8-980A-4100FA190E65}" type="slidenum">
               <a:rPr lang="en-GB" smtClean="0"/>
+              <a:pPr/>
               <a:t>‹#›</a:t>
             </a:fld>
-            <a:endParaRPr lang="en-GB"/>
+            <a:endParaRPr lang="en-GB" dirty="0"/>
           </a:p>
         </p:txBody>
       </p:sp>
@@ -2978,13 +3098,20 @@
         <p:spPr/>
         <p:txBody>
           <a:bodyPr/>
-          <a:lstStyle/>
+          <a:lstStyle>
+            <a:lvl1pPr>
+              <a:defRPr>
+                <a:latin typeface="Candara" panose="020E0502030303020204" pitchFamily="34" charset="0"/>
+              </a:defRPr>
+            </a:lvl1pPr>
+          </a:lstStyle>
           <a:p>
             <a:fld id="{9351F72D-EA3D-46A2-B53E-E9378EBFE7FE}" type="datetimeFigureOut">
               <a:rPr lang="en-GB" smtClean="0"/>
+              <a:pPr/>
               <a:t>21/04/2026</a:t>
             </a:fld>
-            <a:endParaRPr lang="en-GB"/>
+            <a:endParaRPr lang="en-GB" dirty="0"/>
           </a:p>
         </p:txBody>
       </p:sp>
@@ -3007,9 +3134,15 @@
         <p:spPr/>
         <p:txBody>
           <a:bodyPr/>
-          <a:lstStyle/>
-          <a:p>
-            <a:endParaRPr lang="en-GB"/>
+          <a:lstStyle>
+            <a:lvl1pPr>
+              <a:defRPr>
+                <a:latin typeface="Candara" panose="020E0502030303020204" pitchFamily="34" charset="0"/>
+              </a:defRPr>
+            </a:lvl1pPr>
+          </a:lstStyle>
+          <a:p>
+            <a:endParaRPr lang="en-GB" dirty="0"/>
           </a:p>
         </p:txBody>
       </p:sp>
@@ -3032,13 +3165,20 @@
         <p:spPr/>
         <p:txBody>
           <a:bodyPr/>
-          <a:lstStyle/>
+          <a:lstStyle>
+            <a:lvl1pPr>
+              <a:defRPr>
+                <a:latin typeface="Candara" panose="020E0502030303020204" pitchFamily="34" charset="0"/>
+              </a:defRPr>
+            </a:lvl1pPr>
+          </a:lstStyle>
           <a:p>
             <a:fld id="{05EA7042-E667-43C8-980A-4100FA190E65}" type="slidenum">
               <a:rPr lang="en-GB" smtClean="0"/>
+              <a:pPr/>
               <a:t>‹#›</a:t>
             </a:fld>
-            <a:endParaRPr lang="en-GB"/>
+            <a:endParaRPr lang="en-GB" dirty="0"/>
           </a:p>
         </p:txBody>
       </p:sp>
@@ -4077,10 +4217,7 @@
           <a:bodyPr/>
           <a:lstStyle/>
           <a:p>
-            <a:r>
-              <a:rPr lang="en-US" noProof="0"/>
-              <a:t>26/07/2013</a:t>
-            </a:r>
+            <a:endParaRPr lang="en-US" noProof="0" dirty="0"/>
           </a:p>
         </p:txBody>
       </p:sp>
@@ -4127,10 +4264,7 @@
           <a:bodyPr/>
           <a:lstStyle/>
           <a:p>
-            <a:r>
-              <a:rPr lang="en-US" noProof="0" dirty="0"/>
-              <a:t>OASYS-Coherence transport | HERCULES2023</a:t>
-            </a:r>
+            <a:endParaRPr lang="en-US" noProof="0" dirty="0"/>
           </a:p>
         </p:txBody>
       </p:sp>
@@ -4197,10 +4331,10 @@
           </a:lstStyle>
           <a:p>
             <a:r>
-              <a:rPr lang="en-US"/>
+              <a:rPr lang="en-US" dirty="0"/>
               <a:t>Click to edit Master title style</a:t>
             </a:r>
-            <a:endParaRPr lang="en-GB"/>
+            <a:endParaRPr lang="en-GB" dirty="0"/>
           </a:p>
         </p:txBody>
       </p:sp>
@@ -4286,10 +4420,10 @@
           </a:lstStyle>
           <a:p>
             <a:r>
-              <a:rPr lang="en-US"/>
+              <a:rPr lang="en-US" dirty="0"/>
               <a:t>Click to edit Master subtitle style</a:t>
             </a:r>
-            <a:endParaRPr lang="en-GB"/>
+            <a:endParaRPr lang="en-GB" dirty="0"/>
           </a:p>
         </p:txBody>
       </p:sp>
@@ -4428,10 +4562,10 @@
           <a:lstStyle/>
           <a:p>
             <a:r>
-              <a:rPr lang="en-US"/>
+              <a:rPr lang="en-US" dirty="0"/>
               <a:t>Click to edit Master title style</a:t>
             </a:r>
-            <a:endParaRPr lang="en-GB"/>
+            <a:endParaRPr lang="en-GB" dirty="0"/>
           </a:p>
         </p:txBody>
       </p:sp>
@@ -4458,38 +4592,38 @@
           <a:p>
             <a:pPr lvl="0"/>
             <a:r>
-              <a:rPr lang="en-US"/>
+              <a:rPr lang="en-US" dirty="0"/>
               <a:t>Edit Master text styles</a:t>
             </a:r>
           </a:p>
           <a:p>
             <a:pPr lvl="1"/>
             <a:r>
-              <a:rPr lang="en-US"/>
+              <a:rPr lang="en-US" dirty="0"/>
               <a:t>Second level</a:t>
             </a:r>
           </a:p>
           <a:p>
             <a:pPr lvl="2"/>
             <a:r>
-              <a:rPr lang="en-US"/>
+              <a:rPr lang="en-US" dirty="0"/>
               <a:t>Third level</a:t>
             </a:r>
           </a:p>
           <a:p>
             <a:pPr lvl="3"/>
             <a:r>
-              <a:rPr lang="en-US"/>
+              <a:rPr lang="en-US" dirty="0"/>
               <a:t>Fourth level</a:t>
             </a:r>
           </a:p>
           <a:p>
             <a:pPr lvl="4"/>
             <a:r>
-              <a:rPr lang="en-US"/>
+              <a:rPr lang="en-US" dirty="0"/>
               <a:t>Fifth level</a:t>
             </a:r>
-            <a:endParaRPr lang="en-GB"/>
+            <a:endParaRPr lang="en-GB" dirty="0"/>
           </a:p>
         </p:txBody>
       </p:sp>
@@ -4639,10 +4773,10 @@
           </a:lstStyle>
           <a:p>
             <a:r>
-              <a:rPr lang="en-US"/>
+              <a:rPr lang="en-US" dirty="0"/>
               <a:t>Click to edit Master title style</a:t>
             </a:r>
-            <a:endParaRPr lang="en-GB"/>
+            <a:endParaRPr lang="en-GB" dirty="0"/>
           </a:p>
         </p:txBody>
       </p:sp>
@@ -4771,7 +4905,7 @@
           <a:p>
             <a:pPr lvl="0"/>
             <a:r>
-              <a:rPr lang="en-US"/>
+              <a:rPr lang="en-US" dirty="0"/>
               <a:t>Edit Master text styles</a:t>
             </a:r>
           </a:p>
@@ -4796,13 +4930,20 @@
         <p:spPr/>
         <p:txBody>
           <a:bodyPr/>
-          <a:lstStyle/>
+          <a:lstStyle>
+            <a:lvl1pPr>
+              <a:defRPr>
+                <a:latin typeface="Candara" panose="020E0502030303020204" pitchFamily="34" charset="0"/>
+              </a:defRPr>
+            </a:lvl1pPr>
+          </a:lstStyle>
           <a:p>
             <a:fld id="{9351F72D-EA3D-46A2-B53E-E9378EBFE7FE}" type="datetimeFigureOut">
               <a:rPr lang="en-GB" smtClean="0"/>
+              <a:pPr/>
               <a:t>21/04/2026</a:t>
             </a:fld>
-            <a:endParaRPr lang="en-GB"/>
+            <a:endParaRPr lang="en-GB" dirty="0"/>
           </a:p>
         </p:txBody>
       </p:sp>
@@ -4825,9 +4966,15 @@
         <p:spPr/>
         <p:txBody>
           <a:bodyPr/>
-          <a:lstStyle/>
-          <a:p>
-            <a:endParaRPr lang="en-GB"/>
+          <a:lstStyle>
+            <a:lvl1pPr>
+              <a:defRPr>
+                <a:latin typeface="Candara" panose="020E0502030303020204" pitchFamily="34" charset="0"/>
+              </a:defRPr>
+            </a:lvl1pPr>
+          </a:lstStyle>
+          <a:p>
+            <a:endParaRPr lang="en-GB" dirty="0"/>
           </a:p>
         </p:txBody>
       </p:sp>
@@ -4850,13 +4997,20 @@
         <p:spPr/>
         <p:txBody>
           <a:bodyPr/>
-          <a:lstStyle/>
+          <a:lstStyle>
+            <a:lvl1pPr>
+              <a:defRPr>
+                <a:latin typeface="Candara" panose="020E0502030303020204" pitchFamily="34" charset="0"/>
+              </a:defRPr>
+            </a:lvl1pPr>
+          </a:lstStyle>
           <a:p>
             <a:fld id="{05EA7042-E667-43C8-980A-4100FA190E65}" type="slidenum">
               <a:rPr lang="en-GB" smtClean="0"/>
+              <a:pPr/>
               <a:t>‹#›</a:t>
             </a:fld>
-            <a:endParaRPr lang="en-GB"/>
+            <a:endParaRPr lang="en-GB" dirty="0"/>
           </a:p>
         </p:txBody>
       </p:sp>
@@ -4912,10 +5066,10 @@
           <a:lstStyle/>
           <a:p>
             <a:r>
-              <a:rPr lang="en-US"/>
+              <a:rPr lang="en-US" dirty="0"/>
               <a:t>Click to edit Master title style</a:t>
             </a:r>
-            <a:endParaRPr lang="en-GB"/>
+            <a:endParaRPr lang="en-GB" dirty="0"/>
           </a:p>
         </p:txBody>
       </p:sp>
@@ -4947,38 +5101,38 @@
           <a:p>
             <a:pPr lvl="0"/>
             <a:r>
-              <a:rPr lang="en-US"/>
+              <a:rPr lang="en-US" dirty="0"/>
               <a:t>Edit Master text styles</a:t>
             </a:r>
           </a:p>
           <a:p>
             <a:pPr lvl="1"/>
             <a:r>
-              <a:rPr lang="en-US"/>
+              <a:rPr lang="en-US" dirty="0"/>
               <a:t>Second level</a:t>
             </a:r>
           </a:p>
           <a:p>
             <a:pPr lvl="2"/>
             <a:r>
-              <a:rPr lang="en-US"/>
+              <a:rPr lang="en-US" dirty="0"/>
               <a:t>Third level</a:t>
             </a:r>
           </a:p>
           <a:p>
             <a:pPr lvl="3"/>
             <a:r>
-              <a:rPr lang="en-US"/>
+              <a:rPr lang="en-US" dirty="0"/>
               <a:t>Fourth level</a:t>
             </a:r>
           </a:p>
           <a:p>
             <a:pPr lvl="4"/>
             <a:r>
-              <a:rPr lang="en-US"/>
+              <a:rPr lang="en-US" dirty="0"/>
               <a:t>Fifth level</a:t>
             </a:r>
-            <a:endParaRPr lang="en-GB"/>
+            <a:endParaRPr lang="en-GB" dirty="0"/>
           </a:p>
         </p:txBody>
       </p:sp>
@@ -5010,38 +5164,38 @@
           <a:p>
             <a:pPr lvl="0"/>
             <a:r>
-              <a:rPr lang="en-US"/>
+              <a:rPr lang="en-US" dirty="0"/>
               <a:t>Edit Master text styles</a:t>
             </a:r>
           </a:p>
           <a:p>
             <a:pPr lvl="1"/>
             <a:r>
-              <a:rPr lang="en-US"/>
+              <a:rPr lang="en-US" dirty="0"/>
               <a:t>Second level</a:t>
             </a:r>
           </a:p>
           <a:p>
             <a:pPr lvl="2"/>
             <a:r>
-              <a:rPr lang="en-US"/>
+              <a:rPr lang="en-US" dirty="0"/>
               <a:t>Third level</a:t>
             </a:r>
           </a:p>
           <a:p>
             <a:pPr lvl="3"/>
             <a:r>
-              <a:rPr lang="en-US"/>
+              <a:rPr lang="en-US" dirty="0"/>
               <a:t>Fourth level</a:t>
             </a:r>
           </a:p>
           <a:p>
             <a:pPr lvl="4"/>
             <a:r>
-              <a:rPr lang="en-US"/>
+              <a:rPr lang="en-US" dirty="0"/>
               <a:t>Fifth level</a:t>
             </a:r>
-            <a:endParaRPr lang="en-GB"/>
+            <a:endParaRPr lang="en-GB" dirty="0"/>
           </a:p>
         </p:txBody>
       </p:sp>
@@ -5064,13 +5218,20 @@
         <p:spPr/>
         <p:txBody>
           <a:bodyPr/>
-          <a:lstStyle/>
+          <a:lstStyle>
+            <a:lvl1pPr>
+              <a:defRPr>
+                <a:latin typeface="Candara" panose="020E0502030303020204" pitchFamily="34" charset="0"/>
+              </a:defRPr>
+            </a:lvl1pPr>
+          </a:lstStyle>
           <a:p>
             <a:fld id="{9351F72D-EA3D-46A2-B53E-E9378EBFE7FE}" type="datetimeFigureOut">
               <a:rPr lang="en-GB" smtClean="0"/>
+              <a:pPr/>
               <a:t>21/04/2026</a:t>
             </a:fld>
-            <a:endParaRPr lang="en-GB"/>
+            <a:endParaRPr lang="en-GB" dirty="0"/>
           </a:p>
         </p:txBody>
       </p:sp>
@@ -5093,9 +5254,15 @@
         <p:spPr/>
         <p:txBody>
           <a:bodyPr/>
-          <a:lstStyle/>
-          <a:p>
-            <a:endParaRPr lang="en-GB"/>
+          <a:lstStyle>
+            <a:lvl1pPr>
+              <a:defRPr>
+                <a:latin typeface="Candara" panose="020E0502030303020204" pitchFamily="34" charset="0"/>
+              </a:defRPr>
+            </a:lvl1pPr>
+          </a:lstStyle>
+          <a:p>
+            <a:endParaRPr lang="en-GB" dirty="0"/>
           </a:p>
         </p:txBody>
       </p:sp>
@@ -5118,13 +5285,20 @@
         <p:spPr/>
         <p:txBody>
           <a:bodyPr/>
-          <a:lstStyle/>
+          <a:lstStyle>
+            <a:lvl1pPr>
+              <a:defRPr>
+                <a:latin typeface="Candara" panose="020E0502030303020204" pitchFamily="34" charset="0"/>
+              </a:defRPr>
+            </a:lvl1pPr>
+          </a:lstStyle>
           <a:p>
             <a:fld id="{05EA7042-E667-43C8-980A-4100FA190E65}" type="slidenum">
               <a:rPr lang="en-GB" smtClean="0"/>
+              <a:pPr/>
               <a:t>‹#›</a:t>
             </a:fld>
-            <a:endParaRPr lang="en-GB"/>
+            <a:endParaRPr lang="en-GB" dirty="0"/>
           </a:p>
         </p:txBody>
       </p:sp>
@@ -6524,7 +6698,7 @@
           <a:solidFill>
             <a:srgbClr val="254061"/>
           </a:solidFill>
-          <a:latin typeface="+mj-lt"/>
+          <a:latin typeface="Candara" panose="020E0502030303020204" pitchFamily="34" charset="0"/>
           <a:ea typeface="+mj-ea"/>
           <a:cs typeface="+mj-cs"/>
         </a:defRPr>
@@ -6544,7 +6718,7 @@
           <a:solidFill>
             <a:srgbClr val="254061"/>
           </a:solidFill>
-          <a:latin typeface="+mn-lt"/>
+          <a:latin typeface="Candara" panose="020E0502030303020204" pitchFamily="34" charset="0"/>
           <a:ea typeface="+mn-ea"/>
           <a:cs typeface="+mn-cs"/>
         </a:defRPr>
@@ -6562,7 +6736,7 @@
           <a:solidFill>
             <a:srgbClr val="254061"/>
           </a:solidFill>
-          <a:latin typeface="+mn-lt"/>
+          <a:latin typeface="Candara" panose="020E0502030303020204" pitchFamily="34" charset="0"/>
           <a:ea typeface="+mn-ea"/>
           <a:cs typeface="+mn-cs"/>
         </a:defRPr>
@@ -6580,7 +6754,7 @@
           <a:solidFill>
             <a:srgbClr val="254061"/>
           </a:solidFill>
-          <a:latin typeface="+mn-lt"/>
+          <a:latin typeface="Candara" panose="020E0502030303020204" pitchFamily="34" charset="0"/>
           <a:ea typeface="+mn-ea"/>
           <a:cs typeface="+mn-cs"/>
         </a:defRPr>
@@ -6598,7 +6772,7 @@
           <a:solidFill>
             <a:srgbClr val="254061"/>
           </a:solidFill>
-          <a:latin typeface="+mn-lt"/>
+          <a:latin typeface="Candara" panose="020E0502030303020204" pitchFamily="34" charset="0"/>
           <a:ea typeface="+mn-ea"/>
           <a:cs typeface="+mn-cs"/>
         </a:defRPr>
@@ -6616,7 +6790,7 @@
           <a:solidFill>
             <a:srgbClr val="254061"/>
           </a:solidFill>
-          <a:latin typeface="+mn-lt"/>
+          <a:latin typeface="Candara" panose="020E0502030303020204" pitchFamily="34" charset="0"/>
           <a:ea typeface="+mn-ea"/>
           <a:cs typeface="+mn-cs"/>
         </a:defRPr>
@@ -7015,8 +7189,38 @@
         </p:blipFill>
         <p:spPr>
           <a:xfrm>
-            <a:off x="6810569" y="204754"/>
+            <a:off x="6879423" y="269542"/>
             <a:ext cx="2023175" cy="929162"/>
+          </a:xfrm>
+          <a:prstGeom prst="rect">
+            <a:avLst/>
+          </a:prstGeom>
+        </p:spPr>
+      </p:pic>
+      <p:pic>
+        <p:nvPicPr>
+          <p:cNvPr id="4" name="Picture 3">
+            <a:extLst>
+              <a:ext uri="{FF2B5EF4-FFF2-40B4-BE49-F238E27FC236}">
+                <a16:creationId xmlns:a16="http://schemas.microsoft.com/office/drawing/2014/main" id="{6232A31E-AA25-4C2E-A52C-6BA91AB38119}"/>
+              </a:ext>
+            </a:extLst>
+          </p:cNvPr>
+          <p:cNvPicPr>
+            <a:picLocks noChangeAspect="1"/>
+          </p:cNvPicPr>
+          <p:nvPr/>
+        </p:nvPicPr>
+        <p:blipFill>
+          <a:blip r:embed="rId3"/>
+          <a:stretch>
+            <a:fillRect/>
+          </a:stretch>
+        </p:blipFill>
+        <p:spPr>
+          <a:xfrm>
+            <a:off x="494027" y="3147952"/>
+            <a:ext cx="1522664" cy="1015109"/>
           </a:xfrm>
           <a:prstGeom prst="rect">
             <a:avLst/>
